--- a/Docs/business/Circuvent-Sales-Deck.pptx
+++ b/Docs/business/Circuvent-Sales-Deck.pptx
@@ -6752,7 +6752,7 @@
                           </a:solidFill>
                           <a:latin typeface="Calibri"/>
                         </a:rPr>
-                        <a:t>Sump to overhead, filled automatically — with dry-run protection</a:t>
+                        <a:t>Sump to overhead, filled automatically — no cable to the roof</a:t>
                       </a:r>
                     </a:p>
                   </a:txBody>

--- a/Docs/business/Circuvent-Sales-Deck.pptx
+++ b/Docs/business/Circuvent-Sales-Deck.pptx
@@ -3300,7 +3300,7 @@
                 </a:solidFill>
                 <a:latin typeface="Calibri"/>
               </a:rPr>
-              <a:t>21 products for the home, from ₹799. One app, one account, one company behind all of it.</a:t>
+              <a:t>22 products for the home, from ₹799. One app, one account, one company behind all of it.</a:t>
             </a:r>
           </a:p>
         </p:txBody>
@@ -3420,7 +3420,7 @@
                 </a:solidFill>
                 <a:latin typeface="Calibri"/>
               </a:rPr>
-              <a:t>Generated 2026-08-13 from the live product catalogue</a:t>
+              <a:t>Generated 2026-08-15 from the live product catalogue</a:t>
             </a:r>
           </a:p>
         </p:txBody>
@@ -5401,7 +5401,7 @@
         </p:nvGraphicFramePr>
         <p:xfrm>
           <a:off x="777240" y="1828800"/>
-          <a:ext cx="10637214" cy="3255264"/>
+          <a:ext cx="10637214" cy="3657600"/>
         </p:xfrm>
         <a:graphic>
           <a:graphicData uri="http://schemas.openxmlformats.org/drawingml/2006/table">
@@ -6145,6 +6145,98 @@
                   <a:tcPr anchor="ctr" marL="91440" marR="91440">
                     <a:solidFill>
                       <a:srgbClr val="FFFFFF"/>
+                    </a:solidFill>
+                  </a:tcPr>
+                </a:tc>
+              </a:tr>
+              <a:tr h="402336">
+                <a:tc>
+                  <a:txBody>
+                    <a:bodyPr/>
+                    <a:lstStyle/>
+                    <a:p>
+                      <a:r>
+                        <a:rPr sz="1200">
+                          <a:solidFill>
+                            <a:srgbClr val="334155"/>
+                          </a:solidFill>
+                          <a:latin typeface="Calibri"/>
+                        </a:rPr>
+                        <a:t>Circuvent Touch Switchboard 8</a:t>
+                      </a:r>
+                    </a:p>
+                  </a:txBody>
+                  <a:tcPr anchor="ctr" marL="91440">
+                    <a:solidFill>
+                      <a:srgbClr val="F0F4F8"/>
+                    </a:solidFill>
+                  </a:tcPr>
+                </a:tc>
+                <a:tc>
+                  <a:txBody>
+                    <a:bodyPr/>
+                    <a:lstStyle/>
+                    <a:p>
+                      <a:r>
+                        <a:rPr sz="1200">
+                          <a:solidFill>
+                            <a:srgbClr val="334155"/>
+                          </a:solidFill>
+                          <a:latin typeface="Calibri"/>
+                        </a:rPr>
+                        <a:t>Eight capacitive gangs with per-board energy metering</a:t>
+                      </a:r>
+                    </a:p>
+                  </a:txBody>
+                  <a:tcPr anchor="ctr" marL="91440">
+                    <a:solidFill>
+                      <a:srgbClr val="F0F4F8"/>
+                    </a:solidFill>
+                  </a:tcPr>
+                </a:tc>
+                <a:tc>
+                  <a:txBody>
+                    <a:bodyPr/>
+                    <a:lstStyle/>
+                    <a:p>
+                      <a:pPr algn="r"/>
+                      <a:r>
+                        <a:rPr sz="1200">
+                          <a:solidFill>
+                            <a:srgbClr val="334155"/>
+                          </a:solidFill>
+                          <a:latin typeface="Calibri"/>
+                        </a:rPr>
+                        <a:t>₹5,499</a:t>
+                      </a:r>
+                    </a:p>
+                  </a:txBody>
+                  <a:tcPr anchor="ctr" marL="91440" marR="91440">
+                    <a:solidFill>
+                      <a:srgbClr val="F0F4F8"/>
+                    </a:solidFill>
+                  </a:tcPr>
+                </a:tc>
+                <a:tc>
+                  <a:txBody>
+                    <a:bodyPr/>
+                    <a:lstStyle/>
+                    <a:p>
+                      <a:pPr algn="r"/>
+                      <a:r>
+                        <a:rPr sz="1200">
+                          <a:solidFill>
+                            <a:srgbClr val="334155"/>
+                          </a:solidFill>
+                          <a:latin typeface="Calibri"/>
+                        </a:rPr>
+                        <a:t>₹6,799</a:t>
+                      </a:r>
+                    </a:p>
+                  </a:txBody>
+                  <a:tcPr anchor="ctr" marL="91440" marR="91440">
+                    <a:solidFill>
+                      <a:srgbClr val="F0F4F8"/>
                     </a:solidFill>
                   </a:tcPr>
                 </a:tc>
@@ -7999,7 +8091,7 @@
                 </a:solidFill>
                 <a:latin typeface="Calibri"/>
               </a:rPr>
-              <a:t>21</a:t>
+              <a:t>22</a:t>
             </a:r>
           </a:p>
         </p:txBody>
@@ -8514,7 +8606,7 @@
                 </a:solidFill>
                 <a:latin typeface="Calibri"/>
               </a:rPr>
-              <a:t>Generated 2026-08-13 from the live product catalogue</a:t>
+              <a:t>Generated 2026-08-15 from the live product catalogue</a:t>
             </a:r>
           </a:p>
         </p:txBody>
